--- a/slides/break-the-login.pptx
+++ b/slides/break-the-login.pptx
@@ -1480,16 +1480,22 @@
             <a:r>
               <a:rPr lang="en-US" dirty="0"/>
               <a:t>[70–73 · 3 phút]
-Lời dẫn: "Đây là flow OIDC phổ biến cho web/mobile. Không nên tự thiết kế lại nếu có thư viện maintained — hiểu flow và verify đúng là đủ."
-IdP ở đây = Identity Provider: nơi user thực sự gõ mật khẩu / MFA. DevHub chỉ nhận kết quả sau callback.
-Các bước:
-1. Client sinh code_verifier ngẫu nhiên, code_challenge = BASE64URL(SHA256(verifier)), state, nonce; lưu phía server.
-2. Redirect browser tới /authorize với client_id, redirect_uri, scope=openid..., state, nonce, code_challenge, method=S256.
-3. Người dùng xác thực tại IdP.
-4. IdP redirect về redirect_uri với code + state. Client so state với giá trị đã lưu.
-5. Client đổi code + code_verifier lấy token ở /token. IdP kiểm tra SHA256(verifier) == challenge.
-6. Validate ID token: chữ ký (JWKS), iss, aud = client_id, exp, nonce.
-PKCE chặn việc dùng code bị đánh cắp; state chặn CSRF trên callback; nonce chặn replay ID token.</a:t>
+Lời dẫn: giải thích từng param khi xuất hiện trên sơ đồ — đừng đọc như danh sách thuật ngữ.
+state: chuỗi ngẫu nhiên DevHub lưu trước khi redirect. Callback phải mang đúng state → chống kẻ khác “ghim” một login CSRF vào session của bạn.
+nonce: chuỗi ngẫu nhiên gửi lên /authorize và phải có trong ID token. Không khớp → ID token không thuộc lần login này (chống replay).
+PKCE:
+- code_verifier: bí mật ngẫu nhiên, chỉ DevHub giữ, không đưa lên URL.
+- code_challenge = BASE64URL(SHA256(verifier)), gửi lên /authorize.
+- Khi đổi code lấy token, gửi lại verifier; IdP kiểm tra hash khớp challenge. Ai chỉ cầm code (không có verifier) thì vô dụng.
+redirect_uri: phải khớp chính xác URL đã đăng ký ở IdP — tránh code bị đẩy sang domain lạ.
+client_id / scope=openid: IdP biết app nào đang xin login; openid báo đây là OIDC (cần ID token).
+Các bước (đi sơ đồ):
+1. Sinh verifier, challenge, state, nonce — lưu phía server.
+2. Redirect /authorize kèm challenge, state, nonce (không gửi verifier).
+3. User xác thực tại IdP.
+4. Callback: code + state → so state.
+5. POST /token: code + verifier → IdP kiểm PKCE → ID token + access token.
+6. Validate ID token: chữ ký, iss, aud, exp, nonce → tạo session DevHub.</a:t>
             </a:r>
             <a:endParaRPr lang="en-US" dirty="0"/>
           </a:p>
@@ -15736,7 +15742,7 @@
                 <a:ea typeface="Segoe UI" pitchFamily="34" charset="-122"/>
                 <a:cs typeface="Segoe UI" pitchFamily="34" charset="-120"/>
               </a:rPr>
-              <a:t>: gắn callback với đúng lần bấm login này.</a:t>
+              <a:t> — chống CSRF callback: “đây có đúng lần login tôi vừa bấm?”</a:t>
             </a:r>
             <a:endParaRPr lang="en-US" sz="1800" dirty="0"/>
           </a:p>
@@ -15779,7 +15785,7 @@
                 <a:ea typeface="Segoe UI" pitchFamily="34" charset="-122"/>
                 <a:cs typeface="Segoe UI" pitchFamily="34" charset="-120"/>
               </a:rPr>
-              <a:t>: gắn ID token với đúng lần login OIDC.</a:t>
+              <a:t> — gắn ID token với lần login này, chống replay token.</a:t>
             </a:r>
             <a:endParaRPr lang="en-US" sz="1800" dirty="0"/>
           </a:p>
@@ -15805,17 +15811,6 @@
             <a:r>
               <a:rPr lang="en-US" sz="1800" dirty="0">
                 <a:solidFill>
-                  <a:srgbClr val="E8ECF5"/>
-                </a:solidFill>
-                <a:latin typeface="Segoe UI" pitchFamily="34" charset="0"/>
-                <a:ea typeface="Segoe UI" pitchFamily="34" charset="-122"/>
-                <a:cs typeface="Segoe UI" pitchFamily="34" charset="-120"/>
-              </a:rPr>
-              <a:t>PKCE (</a:t>
-            </a:r>
-            <a:r>
-              <a:rPr lang="en-US" sz="1800" dirty="0">
-                <a:solidFill>
                   <a:srgbClr val="B5A5FF"/>
                 </a:solidFill>
                 <a:latin typeface="Consolas" pitchFamily="34" charset="0"/>
@@ -15844,7 +15839,7 @@
                 <a:ea typeface="Consolas" pitchFamily="34" charset="-122"/>
                 <a:cs typeface="Consolas" pitchFamily="34" charset="-120"/>
               </a:rPr>
-              <a:t>challenge</a:t>
+              <a:t>code_challenge</a:t>
             </a:r>
             <a:r>
               <a:rPr lang="en-US" sz="1800" dirty="0">
@@ -15855,7 +15850,7 @@
                 <a:ea typeface="Segoe UI" pitchFamily="34" charset="-122"/>
                 <a:cs typeface="Segoe UI" pitchFamily="34" charset="-120"/>
               </a:rPr>
-              <a:t>): code bị đánh cắp cũng vô dụng.</a:t>
+              <a:t> (PKCE) — code bị đánh cắp cũng đổi token không được.</a:t>
             </a:r>
             <a:endParaRPr lang="en-US" sz="1800" dirty="0"/>
           </a:p>
@@ -15881,13 +15876,24 @@
             <a:r>
               <a:rPr lang="en-US" sz="1800" dirty="0">
                 <a:solidFill>
-                  <a:srgbClr val="E8ECF5"/>
-                </a:solidFill>
-                <a:latin typeface="Segoe UI" pitchFamily="34" charset="0"/>
-                <a:ea typeface="Segoe UI" pitchFamily="34" charset="-122"/>
-                <a:cs typeface="Segoe UI" pitchFamily="34" charset="-120"/>
-              </a:rPr>
-              <a:t>Redirect URI và token phải khớp cấu hình đã đăng ký.</a:t>
+                  <a:srgbClr val="B5A5FF"/>
+                </a:solidFill>
+                <a:latin typeface="Consolas" pitchFamily="34" charset="0"/>
+                <a:ea typeface="Consolas" pitchFamily="34" charset="-122"/>
+                <a:cs typeface="Consolas" pitchFamily="34" charset="-120"/>
+              </a:rPr>
+              <a:t>redirect_uri</a:t>
+            </a:r>
+            <a:r>
+              <a:rPr lang="en-US" sz="1800" dirty="0">
+                <a:solidFill>
+                  <a:srgbClr val="E8ECF5"/>
+                </a:solidFill>
+                <a:latin typeface="Segoe UI" pitchFamily="34" charset="0"/>
+                <a:ea typeface="Segoe UI" pitchFamily="34" charset="-122"/>
+                <a:cs typeface="Segoe UI" pitchFamily="34" charset="-120"/>
+              </a:rPr>
+              <a:t> — chỉ nhận callback đúng URL đã đăng ký với IdP.</a:t>
             </a:r>
             <a:endParaRPr lang="en-US" sz="1800" dirty="0"/>
           </a:p>
@@ -15950,7 +15956,7 @@
         <p:spPr>
           <a:xfrm>
             <a:off x="6484620" y="1883664"/>
-            <a:ext cx="0" cy="3694176"/>
+            <a:ext cx="0" cy="1911096"/>
           </a:xfrm>
           <a:prstGeom prst="line">
             <a:avLst/>
@@ -16006,7 +16012,7 @@
                 <a:ea typeface="Segoe UI" pitchFamily="34" charset="-122"/>
                 <a:cs typeface="Segoe UI" pitchFamily="34" charset="-120"/>
               </a:rPr>
-              <a:t>DevHub client</a:t>
+              <a:t>DevHub</a:t>
             </a:r>
             <a:endParaRPr lang="en-US" sz="1100" dirty="0"/>
           </a:p>
@@ -16021,7 +16027,7 @@
         <p:spPr>
           <a:xfrm>
             <a:off x="8572500" y="1883664"/>
-            <a:ext cx="0" cy="3694176"/>
+            <a:ext cx="0" cy="1911096"/>
           </a:xfrm>
           <a:prstGeom prst="line">
             <a:avLst/>
@@ -16077,7 +16083,7 @@
                 <a:ea typeface="Segoe UI" pitchFamily="34" charset="-122"/>
                 <a:cs typeface="Segoe UI" pitchFamily="34" charset="-120"/>
               </a:rPr>
-              <a:t>Identity Provider</a:t>
+              <a:t>IdP</a:t>
             </a:r>
             <a:endParaRPr lang="en-US" sz="1100" dirty="0"/>
           </a:p>
@@ -16092,7 +16098,7 @@
         <p:spPr>
           <a:xfrm>
             <a:off x="10660380" y="1883664"/>
-            <a:ext cx="0" cy="3694176"/>
+            <a:ext cx="0" cy="1911096"/>
           </a:xfrm>
           <a:prstGeom prst="line">
             <a:avLst/>
@@ -16114,7 +16120,7 @@
         </p:nvSpPr>
         <p:spPr>
           <a:xfrm>
-            <a:off x="7045833" y="2115739"/>
+            <a:off x="7045833" y="2061314"/>
             <a:ext cx="3053334" cy="310896"/>
           </a:xfrm>
           <a:prstGeom prst="roundRect">
@@ -16140,17 +16146,17 @@
               <a:buNone/>
             </a:pPr>
             <a:r>
-              <a:rPr lang="en-US" sz="900" dirty="0">
-                <a:solidFill>
-                  <a:srgbClr val="E8ECF5"/>
-                </a:solidFill>
-                <a:latin typeface="Segoe UI" pitchFamily="34" charset="0"/>
-                <a:ea typeface="Segoe UI" pitchFamily="34" charset="-122"/>
-                <a:cs typeface="Segoe UI" pitchFamily="34" charset="-120"/>
-              </a:rPr>
-              <a:t>1. sinh verifier, challenge, state, nonce</a:t>
-            </a:r>
-            <a:endParaRPr lang="en-US" sz="900" dirty="0"/>
+              <a:rPr lang="en-US" sz="850" dirty="0">
+                <a:solidFill>
+                  <a:srgbClr val="E8ECF5"/>
+                </a:solidFill>
+                <a:latin typeface="Segoe UI" pitchFamily="34" charset="0"/>
+                <a:ea typeface="Segoe UI" pitchFamily="34" charset="-122"/>
+                <a:cs typeface="Segoe UI" pitchFamily="34" charset="-120"/>
+              </a:rPr>
+              <a:t>1. sinh verifier · challenge · state · nonce</a:t>
+            </a:r>
+            <a:endParaRPr lang="en-US" sz="850" dirty="0"/>
           </a:p>
         </p:txBody>
       </p:sp>
@@ -16162,7 +16168,7 @@
         </p:nvSpPr>
         <p:spPr>
           <a:xfrm>
-            <a:off x="6484620" y="2719243"/>
+            <a:off x="6484620" y="2577035"/>
             <a:ext cx="4175760" cy="0"/>
           </a:xfrm>
           <a:prstGeom prst="line">
@@ -16186,7 +16192,7 @@
         </p:nvSpPr>
         <p:spPr>
           <a:xfrm>
-            <a:off x="6530340" y="2435779"/>
+            <a:off x="6530340" y="2293571"/>
             <a:ext cx="4084320" cy="256032"/>
           </a:xfrm>
           <a:prstGeom prst="rect">
@@ -16203,77 +16209,29 @@
               <a:buNone/>
             </a:pPr>
             <a:r>
-              <a:rPr lang="en-US" sz="1000" dirty="0">
-                <a:solidFill>
-                  <a:srgbClr val="E8ECF5"/>
-                </a:solidFill>
-                <a:latin typeface="Segoe UI" pitchFamily="34" charset="0"/>
-                <a:ea typeface="Segoe UI" pitchFamily="34" charset="-122"/>
-                <a:cs typeface="Segoe UI" pitchFamily="34" charset="-120"/>
-              </a:rPr>
-              <a:t>2. GET /authorize?code_challenge&amp;state&amp;nonce</a:t>
-            </a:r>
-            <a:endParaRPr lang="en-US" sz="1000" dirty="0"/>
-          </a:p>
-        </p:txBody>
-      </p:sp>
-      <p:sp>
-        <p:nvSpPr>
-          <p:cNvPr id="16" name="Text 14"/>
-          <p:cNvSpPr/>
-          <p:nvPr/>
-        </p:nvSpPr>
-        <p:spPr>
-          <a:xfrm>
-            <a:off x="9707880" y="3011851"/>
-            <a:ext cx="1905000" cy="310896"/>
-          </a:xfrm>
-          <a:prstGeom prst="roundRect">
-            <a:avLst>
-              <a:gd name="adj" fmla="val 23529"/>
-            </a:avLst>
-          </a:prstGeom>
-          <a:solidFill>
-            <a:srgbClr val="131B2E"/>
-          </a:solidFill>
-          <a:ln w="12700">
-            <a:solidFill>
-              <a:srgbClr val="B5A5FF"/>
-            </a:solidFill>
-            <a:prstDash val="dash"/>
-          </a:ln>
-        </p:spPr>
-        <p:txBody>
-          <a:bodyPr wrap="square" lIns="38100" tIns="38100" rIns="38100" bIns="38100" rtlCol="0" anchor="ctr"/>
-          <a:lstStyle/>
-          <a:p>
-            <a:pPr algn="ctr" indent="0" marL="0">
-              <a:buNone/>
-            </a:pPr>
-            <a:r>
-              <a:rPr lang="en-US" sz="900" dirty="0">
-                <a:solidFill>
-                  <a:srgbClr val="E8ECF5"/>
-                </a:solidFill>
-                <a:latin typeface="Segoe UI" pitchFamily="34" charset="0"/>
-                <a:ea typeface="Segoe UI" pitchFamily="34" charset="-122"/>
-                <a:cs typeface="Segoe UI" pitchFamily="34" charset="-120"/>
-              </a:rPr>
-              <a:t>3. user xác thực</a:t>
-            </a:r>
-            <a:endParaRPr lang="en-US" sz="900" dirty="0"/>
-          </a:p>
-        </p:txBody>
-      </p:sp>
-      <p:sp>
-        <p:nvSpPr>
-          <p:cNvPr id="17" name="Shape 15"/>
+              <a:rPr lang="en-US" sz="950" dirty="0">
+                <a:solidFill>
+                  <a:srgbClr val="E8ECF5"/>
+                </a:solidFill>
+                <a:latin typeface="Segoe UI" pitchFamily="34" charset="0"/>
+                <a:ea typeface="Segoe UI" pitchFamily="34" charset="-122"/>
+                <a:cs typeface="Segoe UI" pitchFamily="34" charset="-120"/>
+              </a:rPr>
+              <a:t>2. /authorize?challenge&amp;state&amp;nonce</a:t>
+            </a:r>
+            <a:endParaRPr lang="en-US" sz="950" dirty="0"/>
+          </a:p>
+        </p:txBody>
+      </p:sp>
+      <p:sp>
+        <p:nvSpPr>
+          <p:cNvPr id="16" name="Shape 14"/>
           <p:cNvSpPr/>
           <p:nvPr/>
         </p:nvSpPr>
         <p:spPr>
           <a:xfrm flipH="1">
-            <a:off x="6484620" y="3615355"/>
+            <a:off x="6484620" y="2937309"/>
             <a:ext cx="4175760" cy="0"/>
           </a:xfrm>
           <a:prstGeom prst="line">
@@ -16291,13 +16249,13 @@
       </p:sp>
       <p:sp>
         <p:nvSpPr>
-          <p:cNvPr id="18" name="Text 16"/>
-          <p:cNvSpPr/>
-          <p:nvPr/>
-        </p:nvSpPr>
-        <p:spPr>
-          <a:xfrm>
-            <a:off x="6530340" y="3331891"/>
+          <p:cNvPr id="17" name="Text 15"/>
+          <p:cNvSpPr/>
+          <p:nvPr/>
+        </p:nvSpPr>
+        <p:spPr>
+          <a:xfrm>
+            <a:off x="6530340" y="2653845"/>
             <a:ext cx="4084320" cy="256032"/>
           </a:xfrm>
           <a:prstGeom prst="rect">
@@ -16314,29 +16272,29 @@
               <a:buNone/>
             </a:pPr>
             <a:r>
-              <a:rPr lang="en-US" sz="1000" dirty="0">
-                <a:solidFill>
-                  <a:srgbClr val="E8ECF5"/>
-                </a:solidFill>
-                <a:latin typeface="Segoe UI" pitchFamily="34" charset="0"/>
-                <a:ea typeface="Segoe UI" pitchFamily="34" charset="-122"/>
-                <a:cs typeface="Segoe UI" pitchFamily="34" charset="-120"/>
-              </a:rPr>
-              <a:t>4. 302 redirect_uri?code&amp;state</a:t>
-            </a:r>
-            <a:endParaRPr lang="en-US" sz="1000" dirty="0"/>
-          </a:p>
-        </p:txBody>
-      </p:sp>
-      <p:sp>
-        <p:nvSpPr>
-          <p:cNvPr id="19" name="Shape 17"/>
-          <p:cNvSpPr/>
-          <p:nvPr/>
-        </p:nvSpPr>
-        <p:spPr>
-          <a:xfrm>
-            <a:off x="6484620" y="4063411"/>
+              <a:rPr lang="en-US" sz="950" dirty="0">
+                <a:solidFill>
+                  <a:srgbClr val="E8ECF5"/>
+                </a:solidFill>
+                <a:latin typeface="Segoe UI" pitchFamily="34" charset="0"/>
+                <a:ea typeface="Segoe UI" pitchFamily="34" charset="-122"/>
+                <a:cs typeface="Segoe UI" pitchFamily="34" charset="-120"/>
+              </a:rPr>
+              <a:t>3. callback?code&amp;state</a:t>
+            </a:r>
+            <a:endParaRPr lang="en-US" sz="950" dirty="0"/>
+          </a:p>
+        </p:txBody>
+      </p:sp>
+      <p:sp>
+        <p:nvSpPr>
+          <p:cNvPr id="18" name="Shape 16"/>
+          <p:cNvSpPr/>
+          <p:nvPr/>
+        </p:nvSpPr>
+        <p:spPr>
+          <a:xfrm>
+            <a:off x="8572500" y="3297582"/>
             <a:ext cx="2087880" cy="0"/>
           </a:xfrm>
           <a:prstGeom prst="line">
@@ -16354,13 +16312,13 @@
       </p:sp>
       <p:sp>
         <p:nvSpPr>
-          <p:cNvPr id="20" name="Text 18"/>
-          <p:cNvSpPr/>
-          <p:nvPr/>
-        </p:nvSpPr>
-        <p:spPr>
-          <a:xfrm>
-            <a:off x="6530340" y="3779947"/>
+          <p:cNvPr id="19" name="Text 17"/>
+          <p:cNvSpPr/>
+          <p:nvPr/>
+        </p:nvSpPr>
+        <p:spPr>
+          <a:xfrm>
+            <a:off x="8618220" y="3014118"/>
             <a:ext cx="1996440" cy="256032"/>
           </a:xfrm>
           <a:prstGeom prst="rect">
@@ -16377,92 +16335,29 @@
               <a:buNone/>
             </a:pPr>
             <a:r>
-              <a:rPr lang="en-US" sz="1000" dirty="0">
-                <a:solidFill>
-                  <a:srgbClr val="E8ECF5"/>
-                </a:solidFill>
-                <a:latin typeface="Segoe UI" pitchFamily="34" charset="0"/>
-                <a:ea typeface="Segoe UI" pitchFamily="34" charset="-122"/>
-                <a:cs typeface="Segoe UI" pitchFamily="34" charset="-120"/>
-              </a:rPr>
-              <a:t>5. callback → so state</a:t>
-            </a:r>
-            <a:endParaRPr lang="en-US" sz="1000" dirty="0"/>
-          </a:p>
-        </p:txBody>
-      </p:sp>
-      <p:sp>
-        <p:nvSpPr>
-          <p:cNvPr id="21" name="Shape 19"/>
-          <p:cNvSpPr/>
-          <p:nvPr/>
-        </p:nvSpPr>
-        <p:spPr>
-          <a:xfrm>
-            <a:off x="8572500" y="4511467"/>
-            <a:ext cx="2087880" cy="0"/>
-          </a:xfrm>
-          <a:prstGeom prst="line">
-            <a:avLst/>
-          </a:prstGeom>
-          <a:noFill/>
-          <a:ln w="19050">
-            <a:solidFill>
-              <a:srgbClr val="B5A5FF"/>
-            </a:solidFill>
-            <a:prstDash val="solid"/>
-            <a:tailEnd type="triangle"/>
-          </a:ln>
-        </p:spPr>
-      </p:sp>
-      <p:sp>
-        <p:nvSpPr>
-          <p:cNvPr id="22" name="Text 20"/>
-          <p:cNvSpPr/>
-          <p:nvPr/>
-        </p:nvSpPr>
-        <p:spPr>
-          <a:xfrm>
-            <a:off x="8618220" y="4228003"/>
-            <a:ext cx="1996440" cy="256032"/>
-          </a:xfrm>
-          <a:prstGeom prst="rect">
-            <a:avLst/>
-          </a:prstGeom>
-          <a:noFill/>
-          <a:ln/>
-        </p:spPr>
-        <p:txBody>
-          <a:bodyPr wrap="square" lIns="25400" tIns="25400" rIns="25400" bIns="25400" rtlCol="0" anchor="b"/>
-          <a:lstStyle/>
-          <a:p>
-            <a:pPr algn="ctr" indent="0" marL="0">
-              <a:buNone/>
-            </a:pPr>
-            <a:r>
-              <a:rPr lang="en-US" sz="1000" dirty="0">
-                <a:solidFill>
-                  <a:srgbClr val="E8ECF5"/>
-                </a:solidFill>
-                <a:latin typeface="Segoe UI" pitchFamily="34" charset="0"/>
-                <a:ea typeface="Segoe UI" pitchFamily="34" charset="-122"/>
-                <a:cs typeface="Segoe UI" pitchFamily="34" charset="-120"/>
-              </a:rPr>
-              <a:t>6. POST /token: code + verifier</a:t>
-            </a:r>
-            <a:endParaRPr lang="en-US" sz="1000" dirty="0"/>
-          </a:p>
-        </p:txBody>
-      </p:sp>
-      <p:sp>
-        <p:nvSpPr>
-          <p:cNvPr id="23" name="Shape 21"/>
+              <a:rPr lang="en-US" sz="950" dirty="0">
+                <a:solidFill>
+                  <a:srgbClr val="E8ECF5"/>
+                </a:solidFill>
+                <a:latin typeface="Segoe UI" pitchFamily="34" charset="0"/>
+                <a:ea typeface="Segoe UI" pitchFamily="34" charset="-122"/>
+                <a:cs typeface="Segoe UI" pitchFamily="34" charset="-120"/>
+              </a:rPr>
+              <a:t>4. /token: code + verifier</a:t>
+            </a:r>
+            <a:endParaRPr lang="en-US" sz="950" dirty="0"/>
+          </a:p>
+        </p:txBody>
+      </p:sp>
+      <p:sp>
+        <p:nvSpPr>
+          <p:cNvPr id="20" name="Shape 18"/>
           <p:cNvSpPr/>
           <p:nvPr/>
         </p:nvSpPr>
         <p:spPr>
           <a:xfrm flipH="1">
-            <a:off x="8572500" y="4959523"/>
+            <a:off x="8572500" y="3657856"/>
             <a:ext cx="2087880" cy="0"/>
           </a:xfrm>
           <a:prstGeom prst="line">
@@ -16480,13 +16375,13 @@
       </p:sp>
       <p:sp>
         <p:nvSpPr>
-          <p:cNvPr id="24" name="Text 22"/>
-          <p:cNvSpPr/>
-          <p:nvPr/>
-        </p:nvSpPr>
-        <p:spPr>
-          <a:xfrm>
-            <a:off x="8618220" y="4676059"/>
+          <p:cNvPr id="21" name="Text 19"/>
+          <p:cNvSpPr/>
+          <p:nvPr/>
+        </p:nvSpPr>
+        <p:spPr>
+          <a:xfrm>
+            <a:off x="8618220" y="3374392"/>
             <a:ext cx="1996440" cy="256032"/>
           </a:xfrm>
           <a:prstGeom prst="rect">
@@ -16503,15 +16398,54 @@
               <a:buNone/>
             </a:pPr>
             <a:r>
-              <a:rPr lang="en-US" sz="1000" dirty="0">
-                <a:solidFill>
-                  <a:srgbClr val="E8ECF5"/>
-                </a:solidFill>
-                <a:latin typeface="Segoe UI" pitchFamily="34" charset="0"/>
-                <a:ea typeface="Segoe UI" pitchFamily="34" charset="-122"/>
-                <a:cs typeface="Segoe UI" pitchFamily="34" charset="-120"/>
-              </a:rPr>
-              <a:t>7. ID token + access token</a:t>
+              <a:rPr lang="en-US" sz="950" dirty="0">
+                <a:solidFill>
+                  <a:srgbClr val="E8ECF5"/>
+                </a:solidFill>
+                <a:latin typeface="Segoe UI" pitchFamily="34" charset="0"/>
+                <a:ea typeface="Segoe UI" pitchFamily="34" charset="-122"/>
+                <a:cs typeface="Segoe UI" pitchFamily="34" charset="-120"/>
+              </a:rPr>
+              <a:t>5. ID token + access token</a:t>
+            </a:r>
+            <a:endParaRPr lang="en-US" sz="950" dirty="0"/>
+          </a:p>
+        </p:txBody>
+      </p:sp>
+      <p:sp>
+        <p:nvSpPr>
+          <p:cNvPr id="22" name="Text 20"/>
+          <p:cNvSpPr/>
+          <p:nvPr/>
+        </p:nvSpPr>
+        <p:spPr>
+          <a:xfrm>
+            <a:off x="5440680" y="3886200"/>
+            <a:ext cx="6263640" cy="228600"/>
+          </a:xfrm>
+          <a:prstGeom prst="rect">
+            <a:avLst/>
+          </a:prstGeom>
+          <a:noFill/>
+          <a:ln/>
+        </p:spPr>
+        <p:txBody>
+          <a:bodyPr wrap="square" lIns="25400" tIns="25400" rIns="25400" bIns="25400" rtlCol="0" anchor="ctr"/>
+          <a:lstStyle/>
+          <a:p>
+            <a:pPr algn="l" indent="0" marL="0">
+              <a:buNone/>
+            </a:pPr>
+            <a:r>
+              <a:rPr lang="en-US" sz="1000" b="1" dirty="0">
+                <a:solidFill>
+                  <a:srgbClr val="8F9BB3"/>
+                </a:solidFill>
+                <a:latin typeface="Segoe UI" pitchFamily="34" charset="0"/>
+                <a:ea typeface="Segoe UI" pitchFamily="34" charset="-122"/>
+                <a:cs typeface="Segoe UI" pitchFamily="34" charset="-120"/>
+              </a:rPr>
+              <a:t>TỪNG PARAM DÙNG ĐỂ LÀM GÌ</a:t>
             </a:r>
             <a:endParaRPr lang="en-US" sz="1000" dirty="0"/>
           </a:p>
@@ -16519,49 +16453,329 @@
       </p:sp>
       <p:sp>
         <p:nvSpPr>
-          <p:cNvPr id="25" name="Text 23"/>
-          <p:cNvSpPr/>
-          <p:nvPr/>
-        </p:nvSpPr>
-        <p:spPr>
-          <a:xfrm>
-            <a:off x="7045833" y="5252131"/>
-            <a:ext cx="3053334" cy="310896"/>
+          <p:cNvPr id="23" name="Text 21"/>
+          <p:cNvSpPr/>
+          <p:nvPr/>
+        </p:nvSpPr>
+        <p:spPr>
+          <a:xfrm>
+            <a:off x="5440680" y="4160520"/>
+            <a:ext cx="1497330" cy="1280160"/>
           </a:xfrm>
           <a:prstGeom prst="roundRect">
             <a:avLst>
-              <a:gd name="adj" fmla="val 23529"/>
+              <a:gd name="adj" fmla="val 5714"/>
             </a:avLst>
           </a:prstGeom>
           <a:solidFill>
-            <a:srgbClr val="131B2E"/>
+            <a:srgbClr val="182238"/>
           </a:solidFill>
           <a:ln w="12700">
             <a:solidFill>
               <a:srgbClr val="B5A5FF"/>
             </a:solidFill>
-            <a:prstDash val="dash"/>
+            <a:prstDash val="solid"/>
           </a:ln>
         </p:spPr>
         <p:txBody>
-          <a:bodyPr wrap="square" lIns="38100" tIns="38100" rIns="38100" bIns="38100" rtlCol="0" anchor="ctr"/>
-          <a:lstStyle/>
-          <a:p>
-            <a:pPr algn="ctr" indent="0" marL="0">
-              <a:buNone/>
-            </a:pPr>
-            <a:r>
-              <a:rPr lang="en-US" sz="900" dirty="0">
-                <a:solidFill>
-                  <a:srgbClr val="E8ECF5"/>
-                </a:solidFill>
-                <a:latin typeface="Segoe UI" pitchFamily="34" charset="0"/>
-                <a:ea typeface="Segoe UI" pitchFamily="34" charset="-122"/>
-                <a:cs typeface="Segoe UI" pitchFamily="34" charset="-120"/>
-              </a:rPr>
-              <a:t>8. validate sig, iss, aud, exp, nonce</a:t>
-            </a:r>
-            <a:endParaRPr lang="en-US" sz="900" dirty="0"/>
+          <a:bodyPr wrap="square" lIns="76200" tIns="76200" rIns="76200" bIns="76200" rtlCol="0" anchor="ctr"/>
+          <a:lstStyle/>
+          <a:p>
+            <a:pPr algn="l" indent="0" marL="0">
+              <a:buNone/>
+            </a:pPr>
+            <a:r>
+              <a:rPr lang="en-US" sz="1200" b="1" dirty="0">
+                <a:solidFill>
+                  <a:srgbClr val="B5A5FF"/>
+                </a:solidFill>
+                <a:latin typeface="Segoe UI" pitchFamily="34" charset="0"/>
+                <a:ea typeface="Segoe UI" pitchFamily="34" charset="-122"/>
+                <a:cs typeface="Segoe UI" pitchFamily="34" charset="-120"/>
+              </a:rPr>
+              <a:t>state</a:t>
+            </a:r>
+            <a:endParaRPr lang="en-US" sz="1200" dirty="0"/>
+          </a:p>
+          <a:p>
+            <a:pPr algn="l" indent="0" marL="0">
+              <a:buNone/>
+            </a:pPr>
+            <a:r>
+              <a:rPr lang="en-US" sz="1000" dirty="0">
+                <a:solidFill>
+                  <a:srgbClr val="E8ECF5"/>
+                </a:solidFill>
+                <a:latin typeface="Segoe UI" pitchFamily="34" charset="0"/>
+                <a:ea typeface="Segoe UI" pitchFamily="34" charset="-122"/>
+                <a:cs typeface="Segoe UI" pitchFamily="34" charset="-120"/>
+              </a:rPr>
+              <a:t>Khớp callback với lần bấm login này.</a:t>
+            </a:r>
+            <a:endParaRPr lang="en-US" sz="1200" dirty="0"/>
+          </a:p>
+          <a:p>
+            <a:pPr algn="l" indent="0" marL="0">
+              <a:buNone/>
+            </a:pPr>
+            <a:r>
+              <a:rPr lang="en-US" sz="1000" dirty="0">
+                <a:solidFill>
+                  <a:srgbClr val="E8ECF5"/>
+                </a:solidFill>
+                <a:latin typeface="Segoe UI" pitchFamily="34" charset="0"/>
+                <a:ea typeface="Segoe UI" pitchFamily="34" charset="-122"/>
+                <a:cs typeface="Segoe UI" pitchFamily="34" charset="-120"/>
+              </a:rPr>
+              <a:t>Chống CSRF trên redirect.</a:t>
+            </a:r>
+            <a:endParaRPr lang="en-US" sz="1200" dirty="0"/>
+          </a:p>
+        </p:txBody>
+      </p:sp>
+      <p:sp>
+        <p:nvSpPr>
+          <p:cNvPr id="24" name="Text 22"/>
+          <p:cNvSpPr/>
+          <p:nvPr/>
+        </p:nvSpPr>
+        <p:spPr>
+          <a:xfrm>
+            <a:off x="7029450" y="4160520"/>
+            <a:ext cx="1497330" cy="1280160"/>
+          </a:xfrm>
+          <a:prstGeom prst="roundRect">
+            <a:avLst>
+              <a:gd name="adj" fmla="val 5714"/>
+            </a:avLst>
+          </a:prstGeom>
+          <a:solidFill>
+            <a:srgbClr val="182238"/>
+          </a:solidFill>
+          <a:ln w="12700">
+            <a:solidFill>
+              <a:srgbClr val="7DB3FF"/>
+            </a:solidFill>
+            <a:prstDash val="solid"/>
+          </a:ln>
+        </p:spPr>
+        <p:txBody>
+          <a:bodyPr wrap="square" lIns="76200" tIns="76200" rIns="76200" bIns="76200" rtlCol="0" anchor="ctr"/>
+          <a:lstStyle/>
+          <a:p>
+            <a:pPr algn="l" indent="0" marL="0">
+              <a:buNone/>
+            </a:pPr>
+            <a:r>
+              <a:rPr lang="en-US" sz="1200" b="1" dirty="0">
+                <a:solidFill>
+                  <a:srgbClr val="7DB3FF"/>
+                </a:solidFill>
+                <a:latin typeface="Segoe UI" pitchFamily="34" charset="0"/>
+                <a:ea typeface="Segoe UI" pitchFamily="34" charset="-122"/>
+                <a:cs typeface="Segoe UI" pitchFamily="34" charset="-120"/>
+              </a:rPr>
+              <a:t>nonce</a:t>
+            </a:r>
+            <a:endParaRPr lang="en-US" sz="1200" dirty="0"/>
+          </a:p>
+          <a:p>
+            <a:pPr algn="l" indent="0" marL="0">
+              <a:buNone/>
+            </a:pPr>
+            <a:r>
+              <a:rPr lang="en-US" sz="1000" dirty="0">
+                <a:solidFill>
+                  <a:srgbClr val="E8ECF5"/>
+                </a:solidFill>
+                <a:latin typeface="Segoe UI" pitchFamily="34" charset="0"/>
+                <a:ea typeface="Segoe UI" pitchFamily="34" charset="-122"/>
+                <a:cs typeface="Segoe UI" pitchFamily="34" charset="-120"/>
+              </a:rPr>
+              <a:t>Phải có trong ID token.</a:t>
+            </a:r>
+            <a:endParaRPr lang="en-US" sz="1200" dirty="0"/>
+          </a:p>
+          <a:p>
+            <a:pPr algn="l" indent="0" marL="0">
+              <a:buNone/>
+            </a:pPr>
+            <a:r>
+              <a:rPr lang="en-US" sz="1000" dirty="0">
+                <a:solidFill>
+                  <a:srgbClr val="E8ECF5"/>
+                </a:solidFill>
+                <a:latin typeface="Segoe UI" pitchFamily="34" charset="0"/>
+                <a:ea typeface="Segoe UI" pitchFamily="34" charset="-122"/>
+                <a:cs typeface="Segoe UI" pitchFamily="34" charset="-120"/>
+              </a:rPr>
+              <a:t>Chống replay ID token.</a:t>
+            </a:r>
+            <a:endParaRPr lang="en-US" sz="1200" dirty="0"/>
+          </a:p>
+        </p:txBody>
+      </p:sp>
+      <p:sp>
+        <p:nvSpPr>
+          <p:cNvPr id="25" name="Text 23"/>
+          <p:cNvSpPr/>
+          <p:nvPr/>
+        </p:nvSpPr>
+        <p:spPr>
+          <a:xfrm>
+            <a:off x="8618220" y="4160520"/>
+            <a:ext cx="1497330" cy="1280160"/>
+          </a:xfrm>
+          <a:prstGeom prst="roundRect">
+            <a:avLst>
+              <a:gd name="adj" fmla="val 5714"/>
+            </a:avLst>
+          </a:prstGeom>
+          <a:solidFill>
+            <a:srgbClr val="182238"/>
+          </a:solidFill>
+          <a:ln w="12700">
+            <a:solidFill>
+              <a:srgbClr val="6EE7B7"/>
+            </a:solidFill>
+            <a:prstDash val="solid"/>
+          </a:ln>
+        </p:spPr>
+        <p:txBody>
+          <a:bodyPr wrap="square" lIns="76200" tIns="76200" rIns="76200" bIns="76200" rtlCol="0" anchor="ctr"/>
+          <a:lstStyle/>
+          <a:p>
+            <a:pPr algn="l" indent="0" marL="0">
+              <a:buNone/>
+            </a:pPr>
+            <a:r>
+              <a:rPr lang="en-US" sz="1200" b="1" dirty="0">
+                <a:solidFill>
+                  <a:srgbClr val="6EE7B7"/>
+                </a:solidFill>
+                <a:latin typeface="Segoe UI" pitchFamily="34" charset="0"/>
+                <a:ea typeface="Segoe UI" pitchFamily="34" charset="-122"/>
+                <a:cs typeface="Segoe UI" pitchFamily="34" charset="-120"/>
+              </a:rPr>
+              <a:t>PKCE</a:t>
+            </a:r>
+            <a:endParaRPr lang="en-US" sz="1200" dirty="0"/>
+          </a:p>
+          <a:p>
+            <a:pPr algn="l" indent="0" marL="0">
+              <a:buNone/>
+            </a:pPr>
+            <a:r>
+              <a:rPr lang="en-US" sz="1000" dirty="0">
+                <a:solidFill>
+                  <a:srgbClr val="E8ECF5"/>
+                </a:solidFill>
+                <a:latin typeface="Segoe UI" pitchFamily="34" charset="0"/>
+                <a:ea typeface="Segoe UI" pitchFamily="34" charset="-122"/>
+                <a:cs typeface="Segoe UI" pitchFamily="34" charset="-120"/>
+              </a:rPr>
+              <a:t>challenge lên URL; verifier giữ bí mật.</a:t>
+            </a:r>
+            <a:endParaRPr lang="en-US" sz="1200" dirty="0"/>
+          </a:p>
+          <a:p>
+            <a:pPr algn="l" indent="0" marL="0">
+              <a:buNone/>
+            </a:pPr>
+            <a:r>
+              <a:rPr lang="en-US" sz="1000" dirty="0">
+                <a:solidFill>
+                  <a:srgbClr val="E8ECF5"/>
+                </a:solidFill>
+                <a:latin typeface="Segoe UI" pitchFamily="34" charset="0"/>
+                <a:ea typeface="Segoe UI" pitchFamily="34" charset="-122"/>
+                <a:cs typeface="Segoe UI" pitchFamily="34" charset="-120"/>
+              </a:rPr>
+              <a:t>Code bị cắp cũng đổi token không được.</a:t>
+            </a:r>
+            <a:endParaRPr lang="en-US" sz="1200" dirty="0"/>
+          </a:p>
+        </p:txBody>
+      </p:sp>
+      <p:sp>
+        <p:nvSpPr>
+          <p:cNvPr id="26" name="Text 24"/>
+          <p:cNvSpPr/>
+          <p:nvPr/>
+        </p:nvSpPr>
+        <p:spPr>
+          <a:xfrm>
+            <a:off x="10206990" y="4160520"/>
+            <a:ext cx="1497330" cy="1280160"/>
+          </a:xfrm>
+          <a:prstGeom prst="roundRect">
+            <a:avLst>
+              <a:gd name="adj" fmla="val 5714"/>
+            </a:avLst>
+          </a:prstGeom>
+          <a:solidFill>
+            <a:srgbClr val="182238"/>
+          </a:solidFill>
+          <a:ln w="12700">
+            <a:solidFill>
+              <a:srgbClr val="F5A65B"/>
+            </a:solidFill>
+            <a:prstDash val="solid"/>
+          </a:ln>
+        </p:spPr>
+        <p:txBody>
+          <a:bodyPr wrap="square" lIns="76200" tIns="76200" rIns="76200" bIns="76200" rtlCol="0" anchor="ctr"/>
+          <a:lstStyle/>
+          <a:p>
+            <a:pPr algn="l" indent="0" marL="0">
+              <a:buNone/>
+            </a:pPr>
+            <a:r>
+              <a:rPr lang="en-US" sz="1200" b="1" dirty="0">
+                <a:solidFill>
+                  <a:srgbClr val="F5A65B"/>
+                </a:solidFill>
+                <a:latin typeface="Segoe UI" pitchFamily="34" charset="0"/>
+                <a:ea typeface="Segoe UI" pitchFamily="34" charset="-122"/>
+                <a:cs typeface="Segoe UI" pitchFamily="34" charset="-120"/>
+              </a:rPr>
+              <a:t>redirect_uri</a:t>
+            </a:r>
+            <a:endParaRPr lang="en-US" sz="1200" dirty="0"/>
+          </a:p>
+          <a:p>
+            <a:pPr algn="l" indent="0" marL="0">
+              <a:buNone/>
+            </a:pPr>
+            <a:r>
+              <a:rPr lang="en-US" sz="1000" dirty="0">
+                <a:solidFill>
+                  <a:srgbClr val="E8ECF5"/>
+                </a:solidFill>
+                <a:latin typeface="Segoe UI" pitchFamily="34" charset="0"/>
+                <a:ea typeface="Segoe UI" pitchFamily="34" charset="-122"/>
+                <a:cs typeface="Segoe UI" pitchFamily="34" charset="-120"/>
+              </a:rPr>
+              <a:t>Chỉ nhận callback đúng URL</a:t>
+            </a:r>
+            <a:endParaRPr lang="en-US" sz="1200" dirty="0"/>
+          </a:p>
+          <a:p>
+            <a:pPr algn="l" indent="0" marL="0">
+              <a:buNone/>
+            </a:pPr>
+            <a:r>
+              <a:rPr lang="en-US" sz="1000" dirty="0">
+                <a:solidFill>
+                  <a:srgbClr val="E8ECF5"/>
+                </a:solidFill>
+                <a:latin typeface="Segoe UI" pitchFamily="34" charset="0"/>
+                <a:ea typeface="Segoe UI" pitchFamily="34" charset="-122"/>
+                <a:cs typeface="Segoe UI" pitchFamily="34" charset="-120"/>
+              </a:rPr>
+              <a:t>đã đăng ký với IdP.</a:t>
+            </a:r>
+            <a:endParaRPr lang="en-US" sz="1200" dirty="0"/>
           </a:p>
         </p:txBody>
       </p:sp>
